--- a/Figure 3/Figure 3.pptx
+++ b/Figure 3/Figure 3.pptx
@@ -7,7 +7,7 @@
   <p:sldIdLst>
     <p:sldId id="256" r:id="rId3"/>
   </p:sldIdLst>
-  <p:sldSz cx="3599815" cy="2879725"/>
+  <p:sldSz cx="7739380" cy="4319905"/>
   <p:notesSz cx="6858000" cy="9144000"/>
   <p:custDataLst>
     <p:tags r:id="rId7"/>
@@ -139,15 +139,15 @@
         </p:nvSpPr>
         <p:spPr>
           <a:xfrm>
-            <a:off x="450869" y="472084"/>
-            <a:ext cx="2705207" cy="1004263"/>
+            <a:off x="969514" y="708361"/>
+            <a:ext cx="5817069" cy="1506893"/>
           </a:xfrm>
         </p:spPr>
         <p:txBody>
           <a:bodyPr anchor="b"/>
           <a:lstStyle>
             <a:lvl1pPr algn="ctr">
-              <a:defRPr sz="2365"/>
+              <a:defRPr sz="3790"/>
             </a:lvl1pPr>
           </a:lstStyle>
           <a:p>
@@ -171,8 +171,8 @@
         </p:nvSpPr>
         <p:spPr>
           <a:xfrm>
-            <a:off x="450869" y="1515075"/>
-            <a:ext cx="2705207" cy="696440"/>
+            <a:off x="969514" y="2273366"/>
+            <a:ext cx="5817069" cy="1045004"/>
           </a:xfrm>
         </p:spPr>
         <p:txBody>
@@ -180,39 +180,39 @@
           <a:lstStyle>
             <a:lvl1pPr marL="0" indent="0" algn="ctr">
               <a:buNone/>
-              <a:defRPr sz="945"/>
+              <a:defRPr sz="1515"/>
             </a:lvl1pPr>
-            <a:lvl2pPr marL="180340" indent="0" algn="ctr">
-              <a:buNone/>
-              <a:defRPr sz="790"/>
+            <a:lvl2pPr marL="288290" indent="0" algn="ctr">
+              <a:buNone/>
+              <a:defRPr sz="1270"/>
             </a:lvl2pPr>
-            <a:lvl3pPr marL="360045" indent="0" algn="ctr">
-              <a:buNone/>
-              <a:defRPr sz="715"/>
+            <a:lvl3pPr marL="575945" indent="0" algn="ctr">
+              <a:buNone/>
+              <a:defRPr sz="1140"/>
             </a:lvl3pPr>
-            <a:lvl4pPr marL="540385" indent="0" algn="ctr">
-              <a:buNone/>
-              <a:defRPr sz="630"/>
+            <a:lvl4pPr marL="865505" indent="0" algn="ctr">
+              <a:buNone/>
+              <a:defRPr sz="1005"/>
             </a:lvl4pPr>
-            <a:lvl5pPr marL="720725" indent="0" algn="ctr">
-              <a:buNone/>
-              <a:defRPr sz="630"/>
+            <a:lvl5pPr marL="1154430" indent="0" algn="ctr">
+              <a:buNone/>
+              <a:defRPr sz="1005"/>
             </a:lvl5pPr>
-            <a:lvl6pPr marL="901700" indent="0" algn="ctr">
-              <a:buNone/>
-              <a:defRPr sz="630"/>
+            <a:lvl6pPr marL="1442085" indent="0" algn="ctr">
+              <a:buNone/>
+              <a:defRPr sz="1005"/>
             </a:lvl6pPr>
-            <a:lvl7pPr marL="1080770" indent="0" algn="ctr">
-              <a:buNone/>
-              <a:defRPr sz="630"/>
+            <a:lvl7pPr marL="1729105" indent="0" algn="ctr">
+              <a:buNone/>
+              <a:defRPr sz="1005"/>
             </a:lvl7pPr>
-            <a:lvl8pPr marL="1261745" indent="0" algn="ctr">
-              <a:buNone/>
-              <a:defRPr sz="630"/>
+            <a:lvl8pPr marL="2019300" indent="0" algn="ctr">
+              <a:buNone/>
+              <a:defRPr sz="1005"/>
             </a:lvl8pPr>
-            <a:lvl9pPr marL="1440815" indent="0" algn="ctr">
-              <a:buNone/>
-              <a:defRPr sz="630"/>
+            <a:lvl9pPr marL="2305685" indent="0" algn="ctr">
+              <a:buNone/>
+              <a:defRPr sz="1005"/>
             </a:lvl9pPr>
           </a:lstStyle>
           <a:p>
@@ -491,8 +491,8 @@
         </p:nvSpPr>
         <p:spPr>
           <a:xfrm>
-            <a:off x="2581219" y="153577"/>
-            <a:ext cx="777747" cy="2444552"/>
+            <a:off x="5550454" y="230442"/>
+            <a:ext cx="1672407" cy="3668044"/>
           </a:xfrm>
         </p:spPr>
         <p:txBody>
@@ -519,8 +519,8 @@
         </p:nvSpPr>
         <p:spPr>
           <a:xfrm>
-            <a:off x="247977" y="153577"/>
-            <a:ext cx="2288155" cy="2444552"/>
+            <a:off x="533231" y="230442"/>
+            <a:ext cx="4920273" cy="3668044"/>
           </a:xfrm>
         </p:spPr>
         <p:txBody>
@@ -835,15 +835,15 @@
         </p:nvSpPr>
         <p:spPr>
           <a:xfrm>
-            <a:off x="246098" y="719143"/>
-            <a:ext cx="3110989" cy="1199907"/>
+            <a:off x="529190" y="1079072"/>
+            <a:ext cx="6689630" cy="1800456"/>
           </a:xfrm>
         </p:spPr>
         <p:txBody>
           <a:bodyPr anchor="b"/>
           <a:lstStyle>
             <a:lvl1pPr>
-              <a:defRPr sz="2365"/>
+              <a:defRPr sz="3790"/>
             </a:lvl1pPr>
           </a:lstStyle>
           <a:p>
@@ -867,8 +867,8 @@
         </p:nvSpPr>
         <p:spPr>
           <a:xfrm>
-            <a:off x="246098" y="1930401"/>
-            <a:ext cx="3110989" cy="631002"/>
+            <a:off x="529190" y="2896561"/>
+            <a:ext cx="6689630" cy="946817"/>
           </a:xfrm>
         </p:spPr>
         <p:txBody>
@@ -876,7 +876,7 @@
           <a:lstStyle>
             <a:lvl1pPr marL="0" indent="0">
               <a:buNone/>
-              <a:defRPr sz="945">
+              <a:defRPr sz="1515">
                 <a:solidFill>
                   <a:schemeClr val="tx1">
                     <a:tint val="75000"/>
@@ -884,9 +884,9 @@
                 </a:solidFill>
               </a:defRPr>
             </a:lvl1pPr>
-            <a:lvl2pPr marL="180340" indent="0">
-              <a:buNone/>
-              <a:defRPr sz="790">
+            <a:lvl2pPr marL="288290" indent="0">
+              <a:buNone/>
+              <a:defRPr sz="1270">
                 <a:solidFill>
                   <a:schemeClr val="tx1">
                     <a:tint val="75000"/>
@@ -894,9 +894,9 @@
                 </a:solidFill>
               </a:defRPr>
             </a:lvl2pPr>
-            <a:lvl3pPr marL="360045" indent="0">
-              <a:buNone/>
-              <a:defRPr sz="715">
+            <a:lvl3pPr marL="575945" indent="0">
+              <a:buNone/>
+              <a:defRPr sz="1140">
                 <a:solidFill>
                   <a:schemeClr val="tx1">
                     <a:tint val="75000"/>
@@ -904,9 +904,9 @@
                 </a:solidFill>
               </a:defRPr>
             </a:lvl3pPr>
-            <a:lvl4pPr marL="540385" indent="0">
-              <a:buNone/>
-              <a:defRPr sz="630">
+            <a:lvl4pPr marL="865505" indent="0">
+              <a:buNone/>
+              <a:defRPr sz="1005">
                 <a:solidFill>
                   <a:schemeClr val="tx1">
                     <a:tint val="75000"/>
@@ -914,9 +914,9 @@
                 </a:solidFill>
               </a:defRPr>
             </a:lvl4pPr>
-            <a:lvl5pPr marL="720725" indent="0">
-              <a:buNone/>
-              <a:defRPr sz="630">
+            <a:lvl5pPr marL="1154430" indent="0">
+              <a:buNone/>
+              <a:defRPr sz="1005">
                 <a:solidFill>
                   <a:schemeClr val="tx1">
                     <a:tint val="75000"/>
@@ -924,9 +924,9 @@
                 </a:solidFill>
               </a:defRPr>
             </a:lvl5pPr>
-            <a:lvl6pPr marL="901700" indent="0">
-              <a:buNone/>
-              <a:defRPr sz="630">
+            <a:lvl6pPr marL="1442085" indent="0">
+              <a:buNone/>
+              <a:defRPr sz="1005">
                 <a:solidFill>
                   <a:schemeClr val="tx1">
                     <a:tint val="75000"/>
@@ -934,9 +934,9 @@
                 </a:solidFill>
               </a:defRPr>
             </a:lvl6pPr>
-            <a:lvl7pPr marL="1080770" indent="0">
-              <a:buNone/>
-              <a:defRPr sz="630">
+            <a:lvl7pPr marL="1729105" indent="0">
+              <a:buNone/>
+              <a:defRPr sz="1005">
                 <a:solidFill>
                   <a:schemeClr val="tx1">
                     <a:tint val="75000"/>
@@ -944,9 +944,9 @@
                 </a:solidFill>
               </a:defRPr>
             </a:lvl7pPr>
-            <a:lvl8pPr marL="1261745" indent="0">
-              <a:buNone/>
-              <a:defRPr sz="630">
+            <a:lvl8pPr marL="2019300" indent="0">
+              <a:buNone/>
+              <a:defRPr sz="1005">
                 <a:solidFill>
                   <a:schemeClr val="tx1">
                     <a:tint val="75000"/>
@@ -954,9 +954,9 @@
                 </a:solidFill>
               </a:defRPr>
             </a:lvl8pPr>
-            <a:lvl9pPr marL="1440815" indent="0">
-              <a:buNone/>
-              <a:defRPr sz="630">
+            <a:lvl9pPr marL="2305685" indent="0">
+              <a:buNone/>
+              <a:defRPr sz="1005">
                 <a:solidFill>
                   <a:schemeClr val="tx1">
                     <a:tint val="75000"/>
@@ -1098,8 +1098,8 @@
         </p:nvSpPr>
         <p:spPr>
           <a:xfrm>
-            <a:off x="247977" y="767887"/>
-            <a:ext cx="1532952" cy="1830242"/>
+            <a:off x="533231" y="1152212"/>
+            <a:ext cx="3296340" cy="2746274"/>
           </a:xfrm>
         </p:spPr>
         <p:txBody>
@@ -1159,8 +1159,8 @@
         </p:nvSpPr>
         <p:spPr>
           <a:xfrm>
-            <a:off x="1826015" y="767887"/>
-            <a:ext cx="1532952" cy="1830242"/>
+            <a:off x="3926523" y="1152212"/>
+            <a:ext cx="3296340" cy="2746274"/>
           </a:xfrm>
         </p:spPr>
         <p:txBody>
@@ -1308,8 +1308,8 @@
         </p:nvSpPr>
         <p:spPr>
           <a:xfrm>
-            <a:off x="248447" y="153577"/>
-            <a:ext cx="3110989" cy="557553"/>
+            <a:off x="534241" y="230442"/>
+            <a:ext cx="6689630" cy="836607"/>
           </a:xfrm>
         </p:spPr>
         <p:txBody>
@@ -1336,8 +1336,8 @@
         </p:nvSpPr>
         <p:spPr>
           <a:xfrm>
-            <a:off x="248447" y="707124"/>
-            <a:ext cx="1525906" cy="346550"/>
+            <a:off x="534241" y="1061039"/>
+            <a:ext cx="3281191" cy="519997"/>
           </a:xfrm>
         </p:spPr>
         <p:txBody>
@@ -1345,39 +1345,39 @@
           <a:lstStyle>
             <a:lvl1pPr marL="0" indent="0">
               <a:buNone/>
-              <a:defRPr sz="945" b="1"/>
+              <a:defRPr sz="1515" b="1"/>
             </a:lvl1pPr>
-            <a:lvl2pPr marL="180340" indent="0">
-              <a:buNone/>
-              <a:defRPr sz="790" b="1"/>
+            <a:lvl2pPr marL="288290" indent="0">
+              <a:buNone/>
+              <a:defRPr sz="1270" b="1"/>
             </a:lvl2pPr>
-            <a:lvl3pPr marL="360045" indent="0">
-              <a:buNone/>
-              <a:defRPr sz="715" b="1"/>
+            <a:lvl3pPr marL="575945" indent="0">
+              <a:buNone/>
+              <a:defRPr sz="1140" b="1"/>
             </a:lvl3pPr>
-            <a:lvl4pPr marL="540385" indent="0">
-              <a:buNone/>
-              <a:defRPr sz="630" b="1"/>
+            <a:lvl4pPr marL="865505" indent="0">
+              <a:buNone/>
+              <a:defRPr sz="1005" b="1"/>
             </a:lvl4pPr>
-            <a:lvl5pPr marL="720725" indent="0">
-              <a:buNone/>
-              <a:defRPr sz="630" b="1"/>
+            <a:lvl5pPr marL="1154430" indent="0">
+              <a:buNone/>
+              <a:defRPr sz="1005" b="1"/>
             </a:lvl5pPr>
-            <a:lvl6pPr marL="901700" indent="0">
-              <a:buNone/>
-              <a:defRPr sz="630" b="1"/>
+            <a:lvl6pPr marL="1442085" indent="0">
+              <a:buNone/>
+              <a:defRPr sz="1005" b="1"/>
             </a:lvl6pPr>
-            <a:lvl7pPr marL="1080770" indent="0">
-              <a:buNone/>
-              <a:defRPr sz="630" b="1"/>
+            <a:lvl7pPr marL="1729105" indent="0">
+              <a:buNone/>
+              <a:defRPr sz="1005" b="1"/>
             </a:lvl7pPr>
-            <a:lvl8pPr marL="1261745" indent="0">
-              <a:buNone/>
-              <a:defRPr sz="630" b="1"/>
+            <a:lvl8pPr marL="2019300" indent="0">
+              <a:buNone/>
+              <a:defRPr sz="1005" b="1"/>
             </a:lvl8pPr>
-            <a:lvl9pPr marL="1440815" indent="0">
-              <a:buNone/>
-              <a:defRPr sz="630" b="1"/>
+            <a:lvl9pPr marL="2305685" indent="0">
+              <a:buNone/>
+              <a:defRPr sz="1005" b="1"/>
             </a:lvl9pPr>
           </a:lstStyle>
           <a:p>
@@ -1402,8 +1402,8 @@
         </p:nvSpPr>
         <p:spPr>
           <a:xfrm>
-            <a:off x="248447" y="1053674"/>
-            <a:ext cx="1525906" cy="1549797"/>
+            <a:off x="534241" y="1581036"/>
+            <a:ext cx="3281191" cy="2325465"/>
           </a:xfrm>
         </p:spPr>
         <p:txBody>
@@ -1463,8 +1463,8 @@
         </p:nvSpPr>
         <p:spPr>
           <a:xfrm>
-            <a:off x="1826015" y="707124"/>
-            <a:ext cx="1533420" cy="346550"/>
+            <a:off x="3926523" y="1061039"/>
+            <a:ext cx="3297348" cy="519997"/>
           </a:xfrm>
         </p:spPr>
         <p:txBody>
@@ -1472,39 +1472,39 @@
           <a:lstStyle>
             <a:lvl1pPr marL="0" indent="0">
               <a:buNone/>
-              <a:defRPr sz="945" b="1"/>
+              <a:defRPr sz="1515" b="1"/>
             </a:lvl1pPr>
-            <a:lvl2pPr marL="180340" indent="0">
-              <a:buNone/>
-              <a:defRPr sz="790" b="1"/>
+            <a:lvl2pPr marL="288290" indent="0">
+              <a:buNone/>
+              <a:defRPr sz="1270" b="1"/>
             </a:lvl2pPr>
-            <a:lvl3pPr marL="360045" indent="0">
-              <a:buNone/>
-              <a:defRPr sz="715" b="1"/>
+            <a:lvl3pPr marL="575945" indent="0">
+              <a:buNone/>
+              <a:defRPr sz="1140" b="1"/>
             </a:lvl3pPr>
-            <a:lvl4pPr marL="540385" indent="0">
-              <a:buNone/>
-              <a:defRPr sz="630" b="1"/>
+            <a:lvl4pPr marL="865505" indent="0">
+              <a:buNone/>
+              <a:defRPr sz="1005" b="1"/>
             </a:lvl4pPr>
-            <a:lvl5pPr marL="720725" indent="0">
-              <a:buNone/>
-              <a:defRPr sz="630" b="1"/>
+            <a:lvl5pPr marL="1154430" indent="0">
+              <a:buNone/>
+              <a:defRPr sz="1005" b="1"/>
             </a:lvl5pPr>
-            <a:lvl6pPr marL="901700" indent="0">
-              <a:buNone/>
-              <a:defRPr sz="630" b="1"/>
+            <a:lvl6pPr marL="1442085" indent="0">
+              <a:buNone/>
+              <a:defRPr sz="1005" b="1"/>
             </a:lvl6pPr>
-            <a:lvl7pPr marL="1080770" indent="0">
-              <a:buNone/>
-              <a:defRPr sz="630" b="1"/>
+            <a:lvl7pPr marL="1729105" indent="0">
+              <a:buNone/>
+              <a:defRPr sz="1005" b="1"/>
             </a:lvl7pPr>
-            <a:lvl8pPr marL="1261745" indent="0">
-              <a:buNone/>
-              <a:defRPr sz="630" b="1"/>
+            <a:lvl8pPr marL="2019300" indent="0">
+              <a:buNone/>
+              <a:defRPr sz="1005" b="1"/>
             </a:lvl8pPr>
-            <a:lvl9pPr marL="1440815" indent="0">
-              <a:buNone/>
-              <a:defRPr sz="630" b="1"/>
+            <a:lvl9pPr marL="2305685" indent="0">
+              <a:buNone/>
+              <a:defRPr sz="1005" b="1"/>
             </a:lvl9pPr>
           </a:lstStyle>
           <a:p>
@@ -1529,8 +1529,8 @@
         </p:nvSpPr>
         <p:spPr>
           <a:xfrm>
-            <a:off x="1826015" y="1053674"/>
-            <a:ext cx="1533420" cy="1549797"/>
+            <a:off x="3926523" y="1581036"/>
+            <a:ext cx="3297348" cy="2325465"/>
           </a:xfrm>
         </p:spPr>
         <p:txBody>
@@ -1877,15 +1877,15 @@
         </p:nvSpPr>
         <p:spPr>
           <a:xfrm>
-            <a:off x="248447" y="192306"/>
-            <a:ext cx="1163332" cy="673069"/>
+            <a:off x="534241" y="288555"/>
+            <a:ext cx="2501540" cy="1009939"/>
           </a:xfrm>
         </p:spPr>
         <p:txBody>
           <a:bodyPr anchor="b"/>
           <a:lstStyle>
             <a:lvl1pPr>
-              <a:defRPr sz="1260"/>
+              <a:defRPr sz="2015"/>
             </a:lvl1pPr>
           </a:lstStyle>
           <a:p>
@@ -1909,39 +1909,39 @@
         </p:nvSpPr>
         <p:spPr>
           <a:xfrm>
-            <a:off x="1533420" y="415327"/>
-            <a:ext cx="1826015" cy="2049925"/>
+            <a:off x="3297348" y="623197"/>
+            <a:ext cx="3926523" cy="3075906"/>
           </a:xfrm>
         </p:spPr>
         <p:txBody>
           <a:bodyPr/>
           <a:lstStyle>
             <a:lvl1pPr>
-              <a:defRPr sz="1260"/>
+              <a:defRPr sz="2015"/>
             </a:lvl1pPr>
             <a:lvl2pPr>
-              <a:defRPr sz="1110"/>
+              <a:defRPr sz="1775"/>
             </a:lvl2pPr>
             <a:lvl3pPr>
-              <a:defRPr sz="945"/>
+              <a:defRPr sz="1515"/>
             </a:lvl3pPr>
             <a:lvl4pPr>
-              <a:defRPr sz="790"/>
+              <a:defRPr sz="1270"/>
             </a:lvl4pPr>
             <a:lvl5pPr>
-              <a:defRPr sz="790"/>
+              <a:defRPr sz="1270"/>
             </a:lvl5pPr>
             <a:lvl6pPr>
-              <a:defRPr sz="790"/>
+              <a:defRPr sz="1270"/>
             </a:lvl6pPr>
             <a:lvl7pPr>
-              <a:defRPr sz="790"/>
+              <a:defRPr sz="1270"/>
             </a:lvl7pPr>
             <a:lvl8pPr>
-              <a:defRPr sz="790"/>
+              <a:defRPr sz="1270"/>
             </a:lvl8pPr>
             <a:lvl9pPr>
-              <a:defRPr sz="790"/>
+              <a:defRPr sz="1270"/>
             </a:lvl9pPr>
           </a:lstStyle>
           <a:p>
@@ -1998,8 +1998,8 @@
         </p:nvSpPr>
         <p:spPr>
           <a:xfrm>
-            <a:off x="248447" y="865376"/>
-            <a:ext cx="1163332" cy="1603216"/>
+            <a:off x="534241" y="1298494"/>
+            <a:ext cx="2501540" cy="2405621"/>
           </a:xfrm>
         </p:spPr>
         <p:txBody>
@@ -2007,39 +2007,39 @@
           <a:lstStyle>
             <a:lvl1pPr marL="0" indent="0">
               <a:buNone/>
-              <a:defRPr sz="630"/>
+              <a:defRPr sz="1005"/>
             </a:lvl1pPr>
-            <a:lvl2pPr marL="180340" indent="0">
-              <a:buNone/>
-              <a:defRPr sz="555"/>
+            <a:lvl2pPr marL="288290" indent="0">
+              <a:buNone/>
+              <a:defRPr sz="885"/>
             </a:lvl2pPr>
-            <a:lvl3pPr marL="360045" indent="0">
-              <a:buNone/>
-              <a:defRPr sz="475"/>
+            <a:lvl3pPr marL="575945" indent="0">
+              <a:buNone/>
+              <a:defRPr sz="755"/>
             </a:lvl3pPr>
-            <a:lvl4pPr marL="540385" indent="0">
-              <a:buNone/>
-              <a:defRPr sz="400"/>
+            <a:lvl4pPr marL="865505" indent="0">
+              <a:buNone/>
+              <a:defRPr sz="635"/>
             </a:lvl4pPr>
-            <a:lvl5pPr marL="720725" indent="0">
-              <a:buNone/>
-              <a:defRPr sz="400"/>
+            <a:lvl5pPr marL="1154430" indent="0">
+              <a:buNone/>
+              <a:defRPr sz="635"/>
             </a:lvl5pPr>
-            <a:lvl6pPr marL="901700" indent="0">
-              <a:buNone/>
-              <a:defRPr sz="400"/>
+            <a:lvl6pPr marL="1442085" indent="0">
+              <a:buNone/>
+              <a:defRPr sz="635"/>
             </a:lvl6pPr>
-            <a:lvl7pPr marL="1080770" indent="0">
-              <a:buNone/>
-              <a:defRPr sz="400"/>
+            <a:lvl7pPr marL="1729105" indent="0">
+              <a:buNone/>
+              <a:defRPr sz="635"/>
             </a:lvl7pPr>
-            <a:lvl8pPr marL="1261745" indent="0">
-              <a:buNone/>
-              <a:defRPr sz="400"/>
+            <a:lvl8pPr marL="2019300" indent="0">
+              <a:buNone/>
+              <a:defRPr sz="635"/>
             </a:lvl8pPr>
-            <a:lvl9pPr marL="1440815" indent="0">
-              <a:buNone/>
-              <a:defRPr sz="400"/>
+            <a:lvl9pPr marL="2305685" indent="0">
+              <a:buNone/>
+              <a:defRPr sz="635"/>
             </a:lvl9pPr>
           </a:lstStyle>
           <a:p>
@@ -2152,15 +2152,15 @@
         </p:nvSpPr>
         <p:spPr>
           <a:xfrm>
-            <a:off x="248447" y="192306"/>
-            <a:ext cx="1163332" cy="673069"/>
+            <a:off x="534241" y="288555"/>
+            <a:ext cx="2501540" cy="1009939"/>
           </a:xfrm>
         </p:spPr>
         <p:txBody>
           <a:bodyPr anchor="b"/>
           <a:lstStyle>
             <a:lvl1pPr>
-              <a:defRPr sz="1260"/>
+              <a:defRPr sz="2015"/>
             </a:lvl1pPr>
           </a:lstStyle>
           <a:p>
@@ -2184,8 +2184,8 @@
         </p:nvSpPr>
         <p:spPr>
           <a:xfrm>
-            <a:off x="1533420" y="415327"/>
-            <a:ext cx="1826015" cy="2049925"/>
+            <a:off x="3297348" y="623197"/>
+            <a:ext cx="3926523" cy="3075906"/>
           </a:xfrm>
         </p:spPr>
         <p:txBody>
@@ -2193,39 +2193,39 @@
           <a:lstStyle>
             <a:lvl1pPr marL="0" indent="0">
               <a:buNone/>
-              <a:defRPr sz="1260"/>
+              <a:defRPr sz="2015"/>
             </a:lvl1pPr>
-            <a:lvl2pPr marL="180340" indent="0">
-              <a:buNone/>
-              <a:defRPr sz="1110"/>
+            <a:lvl2pPr marL="288290" indent="0">
+              <a:buNone/>
+              <a:defRPr sz="1775"/>
             </a:lvl2pPr>
-            <a:lvl3pPr marL="360045" indent="0">
-              <a:buNone/>
-              <a:defRPr sz="945"/>
+            <a:lvl3pPr marL="575945" indent="0">
+              <a:buNone/>
+              <a:defRPr sz="1515"/>
             </a:lvl3pPr>
-            <a:lvl4pPr marL="540385" indent="0">
-              <a:buNone/>
-              <a:defRPr sz="790"/>
+            <a:lvl4pPr marL="865505" indent="0">
+              <a:buNone/>
+              <a:defRPr sz="1270"/>
             </a:lvl4pPr>
-            <a:lvl5pPr marL="720725" indent="0">
-              <a:buNone/>
-              <a:defRPr sz="790"/>
+            <a:lvl5pPr marL="1154430" indent="0">
+              <a:buNone/>
+              <a:defRPr sz="1270"/>
             </a:lvl5pPr>
-            <a:lvl6pPr marL="901700" indent="0">
-              <a:buNone/>
-              <a:defRPr sz="790"/>
+            <a:lvl6pPr marL="1442085" indent="0">
+              <a:buNone/>
+              <a:defRPr sz="1270"/>
             </a:lvl6pPr>
-            <a:lvl7pPr marL="1080770" indent="0">
-              <a:buNone/>
-              <a:defRPr sz="790"/>
+            <a:lvl7pPr marL="1729105" indent="0">
+              <a:buNone/>
+              <a:defRPr sz="1270"/>
             </a:lvl7pPr>
-            <a:lvl8pPr marL="1261745" indent="0">
-              <a:buNone/>
-              <a:defRPr sz="790"/>
+            <a:lvl8pPr marL="2019300" indent="0">
+              <a:buNone/>
+              <a:defRPr sz="1270"/>
             </a:lvl8pPr>
-            <a:lvl9pPr marL="1440815" indent="0">
-              <a:buNone/>
-              <a:defRPr sz="790"/>
+            <a:lvl9pPr marL="2305685" indent="0">
+              <a:buNone/>
+              <a:defRPr sz="1270"/>
             </a:lvl9pPr>
           </a:lstStyle>
           <a:p>
@@ -2245,8 +2245,8 @@
         </p:nvSpPr>
         <p:spPr>
           <a:xfrm>
-            <a:off x="248447" y="865376"/>
-            <a:ext cx="1163332" cy="1603216"/>
+            <a:off x="534241" y="1298494"/>
+            <a:ext cx="2501540" cy="2405621"/>
           </a:xfrm>
         </p:spPr>
         <p:txBody>
@@ -2254,39 +2254,39 @@
           <a:lstStyle>
             <a:lvl1pPr marL="0" indent="0">
               <a:buNone/>
-              <a:defRPr sz="630"/>
+              <a:defRPr sz="1005"/>
             </a:lvl1pPr>
-            <a:lvl2pPr marL="180340" indent="0">
-              <a:buNone/>
-              <a:defRPr sz="555"/>
+            <a:lvl2pPr marL="288290" indent="0">
+              <a:buNone/>
+              <a:defRPr sz="885"/>
             </a:lvl2pPr>
-            <a:lvl3pPr marL="360045" indent="0">
-              <a:buNone/>
-              <a:defRPr sz="475"/>
+            <a:lvl3pPr marL="575945" indent="0">
+              <a:buNone/>
+              <a:defRPr sz="755"/>
             </a:lvl3pPr>
-            <a:lvl4pPr marL="540385" indent="0">
-              <a:buNone/>
-              <a:defRPr sz="400"/>
+            <a:lvl4pPr marL="865505" indent="0">
+              <a:buNone/>
+              <a:defRPr sz="635"/>
             </a:lvl4pPr>
-            <a:lvl5pPr marL="720725" indent="0">
-              <a:buNone/>
-              <a:defRPr sz="400"/>
+            <a:lvl5pPr marL="1154430" indent="0">
+              <a:buNone/>
+              <a:defRPr sz="635"/>
             </a:lvl5pPr>
-            <a:lvl6pPr marL="901700" indent="0">
-              <a:buNone/>
-              <a:defRPr sz="400"/>
+            <a:lvl6pPr marL="1442085" indent="0">
+              <a:buNone/>
+              <a:defRPr sz="635"/>
             </a:lvl6pPr>
-            <a:lvl7pPr marL="1080770" indent="0">
-              <a:buNone/>
-              <a:defRPr sz="400"/>
+            <a:lvl7pPr marL="1729105" indent="0">
+              <a:buNone/>
+              <a:defRPr sz="635"/>
             </a:lvl7pPr>
-            <a:lvl8pPr marL="1261745" indent="0">
-              <a:buNone/>
-              <a:defRPr sz="400"/>
+            <a:lvl8pPr marL="2019300" indent="0">
+              <a:buNone/>
+              <a:defRPr sz="635"/>
             </a:lvl8pPr>
-            <a:lvl9pPr marL="1440815" indent="0">
-              <a:buNone/>
-              <a:defRPr sz="400"/>
+            <a:lvl9pPr marL="2305685" indent="0">
+              <a:buNone/>
+              <a:defRPr sz="635"/>
             </a:lvl9pPr>
           </a:lstStyle>
           <a:p>
@@ -2404,8 +2404,8 @@
         </p:nvSpPr>
         <p:spPr>
           <a:xfrm>
-            <a:off x="247977" y="153577"/>
-            <a:ext cx="3110989" cy="557553"/>
+            <a:off x="533231" y="230442"/>
+            <a:ext cx="6689630" cy="836607"/>
           </a:xfrm>
           <a:prstGeom prst="rect">
             <a:avLst/>
@@ -2437,8 +2437,8 @@
         </p:nvSpPr>
         <p:spPr>
           <a:xfrm>
-            <a:off x="247977" y="767887"/>
-            <a:ext cx="3110989" cy="1830242"/>
+            <a:off x="533231" y="1152212"/>
+            <a:ext cx="6689630" cy="2746274"/>
           </a:xfrm>
           <a:prstGeom prst="rect">
             <a:avLst/>
@@ -2503,8 +2503,8 @@
         </p:nvSpPr>
         <p:spPr>
           <a:xfrm>
-            <a:off x="247977" y="2673582"/>
-            <a:ext cx="811561" cy="153577"/>
+            <a:off x="533231" y="4011703"/>
+            <a:ext cx="1745118" cy="230442"/>
           </a:xfrm>
           <a:prstGeom prst="rect">
             <a:avLst/>
@@ -2514,7 +2514,7 @@
           <a:bodyPr vert="horz" lIns="91440" tIns="45720" rIns="91440" bIns="45720" rtlCol="0" anchor="ctr"/>
           <a:lstStyle>
             <a:lvl1pPr algn="l">
-              <a:defRPr sz="475">
+              <a:defRPr sz="755">
                 <a:solidFill>
                   <a:schemeClr val="tx1">
                     <a:tint val="75000"/>
@@ -2543,8 +2543,8 @@
         </p:nvSpPr>
         <p:spPr>
           <a:xfrm>
-            <a:off x="1194799" y="2673582"/>
-            <a:ext cx="1217343" cy="153577"/>
+            <a:off x="2569205" y="4011703"/>
+            <a:ext cx="2617681" cy="230442"/>
           </a:xfrm>
           <a:prstGeom prst="rect">
             <a:avLst/>
@@ -2554,7 +2554,7 @@
           <a:bodyPr vert="horz" lIns="91440" tIns="45720" rIns="91440" bIns="45720" rtlCol="0" anchor="ctr"/>
           <a:lstStyle>
             <a:lvl1pPr algn="ctr">
-              <a:defRPr sz="475">
+              <a:defRPr sz="755">
                 <a:solidFill>
                   <a:schemeClr val="tx1">
                     <a:tint val="75000"/>
@@ -2580,8 +2580,8 @@
         </p:nvSpPr>
         <p:spPr>
           <a:xfrm>
-            <a:off x="2547405" y="2673582"/>
-            <a:ext cx="811561" cy="153577"/>
+            <a:off x="5477742" y="4011703"/>
+            <a:ext cx="1745118" cy="230442"/>
           </a:xfrm>
           <a:prstGeom prst="rect">
             <a:avLst/>
@@ -2591,7 +2591,7 @@
           <a:bodyPr vert="horz" lIns="91440" tIns="45720" rIns="91440" bIns="45720" rtlCol="0" anchor="ctr"/>
           <a:lstStyle>
             <a:lvl1pPr algn="r">
-              <a:defRPr sz="475">
+              <a:defRPr sz="755">
                 <a:solidFill>
                   <a:schemeClr val="tx1">
                     <a:tint val="75000"/>
@@ -2626,7 +2626,7 @@
   </p:sldLayoutIdLst>
   <p:txStyles>
     <p:titleStyle>
-      <a:lvl1pPr algn="l" defTabSz="360045" rtl="0" eaLnBrk="1" latinLnBrk="0" hangingPunct="1">
+      <a:lvl1pPr algn="l" defTabSz="575945" rtl="0" eaLnBrk="1" latinLnBrk="0" hangingPunct="1">
         <a:lnSpc>
           <a:spcPct val="90000"/>
         </a:lnSpc>
@@ -2634,7 +2634,7 @@
           <a:spcPct val="0"/>
         </a:spcBef>
         <a:buNone/>
-        <a:defRPr sz="1735" kern="1200">
+        <a:defRPr sz="2775" kern="1200">
           <a:solidFill>
             <a:schemeClr val="tx1"/>
           </a:solidFill>
@@ -2645,16 +2645,16 @@
       </a:lvl1pPr>
     </p:titleStyle>
     <p:bodyStyle>
-      <a:lvl1pPr marL="90805" indent="-90805" algn="l" defTabSz="360045" rtl="0" eaLnBrk="1" latinLnBrk="0" hangingPunct="1">
+      <a:lvl1pPr marL="144780" indent="-144780" algn="l" defTabSz="575945" rtl="0" eaLnBrk="1" latinLnBrk="0" hangingPunct="1">
         <a:lnSpc>
           <a:spcPct val="90000"/>
         </a:lnSpc>
         <a:spcBef>
-          <a:spcPct val="78000"/>
+          <a:spcPts val="620"/>
         </a:spcBef>
         <a:buFont typeface="Arial" panose="020B0604020202020204" pitchFamily="34" charset="0"/>
         <a:buChar char="•"/>
-        <a:defRPr sz="1110" kern="1200">
+        <a:defRPr sz="1775" kern="1200">
           <a:solidFill>
             <a:schemeClr val="tx1"/>
           </a:solidFill>
@@ -2663,16 +2663,16 @@
           <a:cs typeface="+mn-cs"/>
         </a:defRPr>
       </a:lvl1pPr>
-      <a:lvl2pPr marL="270510" indent="-90805" algn="l" defTabSz="360045" rtl="0" eaLnBrk="1" latinLnBrk="0" hangingPunct="1">
+      <a:lvl2pPr marL="432435" indent="-144780" algn="l" defTabSz="575945" rtl="0" eaLnBrk="1" latinLnBrk="0" hangingPunct="1">
         <a:lnSpc>
           <a:spcPct val="90000"/>
         </a:lnSpc>
         <a:spcBef>
-          <a:spcPct val="39000"/>
+          <a:spcPct val="62000"/>
         </a:spcBef>
         <a:buFont typeface="Arial" panose="020B0604020202020204" pitchFamily="34" charset="0"/>
         <a:buChar char="•"/>
-        <a:defRPr sz="945" kern="1200">
+        <a:defRPr sz="1515" kern="1200">
           <a:solidFill>
             <a:schemeClr val="tx1"/>
           </a:solidFill>
@@ -2681,16 +2681,16 @@
           <a:cs typeface="+mn-cs"/>
         </a:defRPr>
       </a:lvl2pPr>
-      <a:lvl3pPr marL="451485" indent="-90805" algn="l" defTabSz="360045" rtl="0" eaLnBrk="1" latinLnBrk="0" hangingPunct="1">
+      <a:lvl3pPr marL="721360" indent="-144780" algn="l" defTabSz="575945" rtl="0" eaLnBrk="1" latinLnBrk="0" hangingPunct="1">
         <a:lnSpc>
           <a:spcPct val="90000"/>
         </a:lnSpc>
         <a:spcBef>
-          <a:spcPct val="39000"/>
+          <a:spcPct val="62000"/>
         </a:spcBef>
         <a:buFont typeface="Arial" panose="020B0604020202020204" pitchFamily="34" charset="0"/>
         <a:buChar char="•"/>
-        <a:defRPr sz="790" kern="1200">
+        <a:defRPr sz="1270" kern="1200">
           <a:solidFill>
             <a:schemeClr val="tx1"/>
           </a:solidFill>
@@ -2699,16 +2699,16 @@
           <a:cs typeface="+mn-cs"/>
         </a:defRPr>
       </a:lvl3pPr>
-      <a:lvl4pPr marL="631190" indent="-90805" algn="l" defTabSz="360045" rtl="0" eaLnBrk="1" latinLnBrk="0" hangingPunct="1">
+      <a:lvl4pPr marL="1010920" indent="-144780" algn="l" defTabSz="575945" rtl="0" eaLnBrk="1" latinLnBrk="0" hangingPunct="1">
         <a:lnSpc>
           <a:spcPct val="90000"/>
         </a:lnSpc>
         <a:spcBef>
-          <a:spcPct val="39000"/>
+          <a:spcPct val="62000"/>
         </a:spcBef>
         <a:buFont typeface="Arial" panose="020B0604020202020204" pitchFamily="34" charset="0"/>
         <a:buChar char="•"/>
-        <a:defRPr sz="715" kern="1200">
+        <a:defRPr sz="1140" kern="1200">
           <a:solidFill>
             <a:schemeClr val="tx1"/>
           </a:solidFill>
@@ -2717,16 +2717,16 @@
           <a:cs typeface="+mn-cs"/>
         </a:defRPr>
       </a:lvl4pPr>
-      <a:lvl5pPr marL="811530" indent="-90805" algn="l" defTabSz="360045" rtl="0" eaLnBrk="1" latinLnBrk="0" hangingPunct="1">
+      <a:lvl5pPr marL="1298575" indent="-144780" algn="l" defTabSz="575945" rtl="0" eaLnBrk="1" latinLnBrk="0" hangingPunct="1">
         <a:lnSpc>
           <a:spcPct val="90000"/>
         </a:lnSpc>
         <a:spcBef>
-          <a:spcPct val="39000"/>
+          <a:spcPct val="62000"/>
         </a:spcBef>
         <a:buFont typeface="Arial" panose="020B0604020202020204" pitchFamily="34" charset="0"/>
         <a:buChar char="•"/>
-        <a:defRPr sz="715" kern="1200">
+        <a:defRPr sz="1140" kern="1200">
           <a:solidFill>
             <a:schemeClr val="tx1"/>
           </a:solidFill>
@@ -2735,16 +2735,16 @@
           <a:cs typeface="+mn-cs"/>
         </a:defRPr>
       </a:lvl5pPr>
-      <a:lvl6pPr marL="989965" indent="-90805" algn="l" defTabSz="360045" rtl="0" eaLnBrk="1" latinLnBrk="0" hangingPunct="1">
+      <a:lvl6pPr marL="1584325" indent="-144780" algn="l" defTabSz="575945" rtl="0" eaLnBrk="1" latinLnBrk="0" hangingPunct="1">
         <a:lnSpc>
           <a:spcPct val="90000"/>
         </a:lnSpc>
         <a:spcBef>
-          <a:spcPct val="39000"/>
+          <a:spcPct val="62000"/>
         </a:spcBef>
         <a:buFont typeface="Arial" panose="020B0604020202020204" pitchFamily="34" charset="0"/>
         <a:buChar char="•"/>
-        <a:defRPr sz="715" kern="1200">
+        <a:defRPr sz="1140" kern="1200">
           <a:solidFill>
             <a:schemeClr val="tx1"/>
           </a:solidFill>
@@ -2753,16 +2753,16 @@
           <a:cs typeface="+mn-cs"/>
         </a:defRPr>
       </a:lvl6pPr>
-      <a:lvl7pPr marL="1170940" indent="-90805" algn="l" defTabSz="360045" rtl="0" eaLnBrk="1" latinLnBrk="0" hangingPunct="1">
+      <a:lvl7pPr marL="1874520" indent="-144780" algn="l" defTabSz="575945" rtl="0" eaLnBrk="1" latinLnBrk="0" hangingPunct="1">
         <a:lnSpc>
           <a:spcPct val="90000"/>
         </a:lnSpc>
         <a:spcBef>
-          <a:spcPct val="39000"/>
+          <a:spcPct val="62000"/>
         </a:spcBef>
         <a:buFont typeface="Arial" panose="020B0604020202020204" pitchFamily="34" charset="0"/>
         <a:buChar char="•"/>
-        <a:defRPr sz="715" kern="1200">
+        <a:defRPr sz="1140" kern="1200">
           <a:solidFill>
             <a:schemeClr val="tx1"/>
           </a:solidFill>
@@ -2771,16 +2771,16 @@
           <a:cs typeface="+mn-cs"/>
         </a:defRPr>
       </a:lvl7pPr>
-      <a:lvl8pPr marL="1351915" indent="-90805" algn="l" defTabSz="360045" rtl="0" eaLnBrk="1" latinLnBrk="0" hangingPunct="1">
+      <a:lvl8pPr marL="2162810" indent="-144780" algn="l" defTabSz="575945" rtl="0" eaLnBrk="1" latinLnBrk="0" hangingPunct="1">
         <a:lnSpc>
           <a:spcPct val="90000"/>
         </a:lnSpc>
         <a:spcBef>
-          <a:spcPct val="39000"/>
+          <a:spcPct val="62000"/>
         </a:spcBef>
         <a:buFont typeface="Arial" panose="020B0604020202020204" pitchFamily="34" charset="0"/>
         <a:buChar char="•"/>
-        <a:defRPr sz="715" kern="1200">
+        <a:defRPr sz="1140" kern="1200">
           <a:solidFill>
             <a:schemeClr val="tx1"/>
           </a:solidFill>
@@ -2789,16 +2789,16 @@
           <a:cs typeface="+mn-cs"/>
         </a:defRPr>
       </a:lvl8pPr>
-      <a:lvl9pPr marL="1532890" indent="-90805" algn="l" defTabSz="360045" rtl="0" eaLnBrk="1" latinLnBrk="0" hangingPunct="1">
+      <a:lvl9pPr marL="2453005" indent="-144780" algn="l" defTabSz="575945" rtl="0" eaLnBrk="1" latinLnBrk="0" hangingPunct="1">
         <a:lnSpc>
           <a:spcPct val="90000"/>
         </a:lnSpc>
         <a:spcBef>
-          <a:spcPct val="39000"/>
+          <a:spcPct val="62000"/>
         </a:spcBef>
         <a:buFont typeface="Arial" panose="020B0604020202020204" pitchFamily="34" charset="0"/>
         <a:buChar char="•"/>
-        <a:defRPr sz="715" kern="1200">
+        <a:defRPr sz="1140" kern="1200">
           <a:solidFill>
             <a:schemeClr val="tx1"/>
           </a:solidFill>
@@ -2812,8 +2812,8 @@
       <a:defPPr>
         <a:defRPr lang="zh-CN"/>
       </a:defPPr>
-      <a:lvl1pPr marL="0" algn="l" defTabSz="360045" rtl="0" eaLnBrk="1" latinLnBrk="0" hangingPunct="1">
-        <a:defRPr sz="715" kern="1200">
+      <a:lvl1pPr marL="0" algn="l" defTabSz="575945" rtl="0" eaLnBrk="1" latinLnBrk="0" hangingPunct="1">
+        <a:defRPr sz="1140" kern="1200">
           <a:solidFill>
             <a:schemeClr val="tx1"/>
           </a:solidFill>
@@ -2822,8 +2822,8 @@
           <a:cs typeface="+mn-cs"/>
         </a:defRPr>
       </a:lvl1pPr>
-      <a:lvl2pPr marL="180340" algn="l" defTabSz="360045" rtl="0" eaLnBrk="1" latinLnBrk="0" hangingPunct="1">
-        <a:defRPr sz="715" kern="1200">
+      <a:lvl2pPr marL="288290" algn="l" defTabSz="575945" rtl="0" eaLnBrk="1" latinLnBrk="0" hangingPunct="1">
+        <a:defRPr sz="1140" kern="1200">
           <a:solidFill>
             <a:schemeClr val="tx1"/>
           </a:solidFill>
@@ -2832,8 +2832,8 @@
           <a:cs typeface="+mn-cs"/>
         </a:defRPr>
       </a:lvl2pPr>
-      <a:lvl3pPr marL="360045" algn="l" defTabSz="360045" rtl="0" eaLnBrk="1" latinLnBrk="0" hangingPunct="1">
-        <a:defRPr sz="715" kern="1200">
+      <a:lvl3pPr marL="575945" algn="l" defTabSz="575945" rtl="0" eaLnBrk="1" latinLnBrk="0" hangingPunct="1">
+        <a:defRPr sz="1140" kern="1200">
           <a:solidFill>
             <a:schemeClr val="tx1"/>
           </a:solidFill>
@@ -2842,8 +2842,8 @@
           <a:cs typeface="+mn-cs"/>
         </a:defRPr>
       </a:lvl3pPr>
-      <a:lvl4pPr marL="540385" algn="l" defTabSz="360045" rtl="0" eaLnBrk="1" latinLnBrk="0" hangingPunct="1">
-        <a:defRPr sz="715" kern="1200">
+      <a:lvl4pPr marL="865505" algn="l" defTabSz="575945" rtl="0" eaLnBrk="1" latinLnBrk="0" hangingPunct="1">
+        <a:defRPr sz="1140" kern="1200">
           <a:solidFill>
             <a:schemeClr val="tx1"/>
           </a:solidFill>
@@ -2852,8 +2852,8 @@
           <a:cs typeface="+mn-cs"/>
         </a:defRPr>
       </a:lvl4pPr>
-      <a:lvl5pPr marL="720725" algn="l" defTabSz="360045" rtl="0" eaLnBrk="1" latinLnBrk="0" hangingPunct="1">
-        <a:defRPr sz="715" kern="1200">
+      <a:lvl5pPr marL="1154430" algn="l" defTabSz="575945" rtl="0" eaLnBrk="1" latinLnBrk="0" hangingPunct="1">
+        <a:defRPr sz="1140" kern="1200">
           <a:solidFill>
             <a:schemeClr val="tx1"/>
           </a:solidFill>
@@ -2862,8 +2862,8 @@
           <a:cs typeface="+mn-cs"/>
         </a:defRPr>
       </a:lvl5pPr>
-      <a:lvl6pPr marL="901700" algn="l" defTabSz="360045" rtl="0" eaLnBrk="1" latinLnBrk="0" hangingPunct="1">
-        <a:defRPr sz="715" kern="1200">
+      <a:lvl6pPr marL="1442085" algn="l" defTabSz="575945" rtl="0" eaLnBrk="1" latinLnBrk="0" hangingPunct="1">
+        <a:defRPr sz="1140" kern="1200">
           <a:solidFill>
             <a:schemeClr val="tx1"/>
           </a:solidFill>
@@ -2872,8 +2872,8 @@
           <a:cs typeface="+mn-cs"/>
         </a:defRPr>
       </a:lvl6pPr>
-      <a:lvl7pPr marL="1080770" algn="l" defTabSz="360045" rtl="0" eaLnBrk="1" latinLnBrk="0" hangingPunct="1">
-        <a:defRPr sz="715" kern="1200">
+      <a:lvl7pPr marL="1729105" algn="l" defTabSz="575945" rtl="0" eaLnBrk="1" latinLnBrk="0" hangingPunct="1">
+        <a:defRPr sz="1140" kern="1200">
           <a:solidFill>
             <a:schemeClr val="tx1"/>
           </a:solidFill>
@@ -2882,8 +2882,8 @@
           <a:cs typeface="+mn-cs"/>
         </a:defRPr>
       </a:lvl7pPr>
-      <a:lvl8pPr marL="1261745" algn="l" defTabSz="360045" rtl="0" eaLnBrk="1" latinLnBrk="0" hangingPunct="1">
-        <a:defRPr sz="715" kern="1200">
+      <a:lvl8pPr marL="2019300" algn="l" defTabSz="575945" rtl="0" eaLnBrk="1" latinLnBrk="0" hangingPunct="1">
+        <a:defRPr sz="1140" kern="1200">
           <a:solidFill>
             <a:schemeClr val="tx1"/>
           </a:solidFill>
@@ -2892,8 +2892,8 @@
           <a:cs typeface="+mn-cs"/>
         </a:defRPr>
       </a:lvl8pPr>
-      <a:lvl9pPr marL="1440815" algn="l" defTabSz="360045" rtl="0" eaLnBrk="1" latinLnBrk="0" hangingPunct="1">
-        <a:defRPr sz="715" kern="1200">
+      <a:lvl9pPr marL="2305685" algn="l" defTabSz="575945" rtl="0" eaLnBrk="1" latinLnBrk="0" hangingPunct="1">
+        <a:defRPr sz="1140" kern="1200">
           <a:solidFill>
             <a:schemeClr val="tx1"/>
           </a:solidFill>
@@ -2919,33 +2919,79 @@
       <p:grpSpPr/>
       <p:pic>
         <p:nvPicPr>
-          <p:cNvPr id="3" name="图片 2" descr="Figure 2(A)"/>
+          <p:cNvPr id="9" name="图片 8" descr="Figure 3(C)"/>
           <p:cNvPicPr>
             <a:picLocks noChangeAspect="1"/>
           </p:cNvPicPr>
-          <p:nvPr>
-            <p:custDataLst>
-              <p:tags r:id="rId1"/>
-            </p:custDataLst>
-          </p:nvPr>
+          <p:nvPr/>
         </p:nvPicPr>
         <p:blipFill>
-          <a:blip r:embed="rId2"/>
-          <a:srcRect l="8415" t="5226" r="12365" b="13275"/>
+          <a:blip r:embed="rId1"/>
+          <a:srcRect l="2825" t="5351" r="8771" b="10644"/>
           <a:stretch>
             <a:fillRect/>
           </a:stretch>
         </p:blipFill>
         <p:spPr>
           <a:xfrm>
-            <a:off x="168478" y="262393"/>
-            <a:ext cx="3240000" cy="2585285"/>
+            <a:off x="5697855" y="151130"/>
+            <a:ext cx="1904661" cy="3312000"/>
           </a:xfrm>
           <a:prstGeom prst="rect">
             <a:avLst/>
           </a:prstGeom>
         </p:spPr>
       </p:pic>
+      <p:pic>
+        <p:nvPicPr>
+          <p:cNvPr id="4" name="图片 3" descr="Figure 3(B)"/>
+          <p:cNvPicPr>
+            <a:picLocks noChangeAspect="1"/>
+          </p:cNvPicPr>
+          <p:nvPr/>
+        </p:nvPicPr>
+        <p:blipFill>
+          <a:blip r:embed="rId2"/>
+          <a:srcRect t="5641" r="7871" b="4788"/>
+          <a:stretch>
+            <a:fillRect/>
+          </a:stretch>
+        </p:blipFill>
+        <p:spPr>
+          <a:xfrm>
+            <a:off x="4535805" y="1810385"/>
+            <a:ext cx="1030864" cy="1551600"/>
+          </a:xfrm>
+          <a:prstGeom prst="rect">
+            <a:avLst/>
+          </a:prstGeom>
+        </p:spPr>
+      </p:pic>
+      <p:pic>
+        <p:nvPicPr>
+          <p:cNvPr id="3" name="图片 2" descr="Figure 3(A)"/>
+          <p:cNvPicPr>
+            <a:picLocks noChangeAspect="1"/>
+          </p:cNvPicPr>
+          <p:nvPr/>
+        </p:nvPicPr>
+        <p:blipFill>
+          <a:blip r:embed="rId3"/>
+          <a:srcRect l="9098" t="5322" r="15678" b="14261"/>
+          <a:stretch>
+            <a:fillRect/>
+          </a:stretch>
+        </p:blipFill>
+        <p:spPr>
+          <a:xfrm>
+            <a:off x="159385" y="161290"/>
+            <a:ext cx="4270482" cy="3312000"/>
+          </a:xfrm>
+          <a:prstGeom prst="rect">
+            <a:avLst/>
+          </a:prstGeom>
+        </p:spPr>
+      </p:pic>
       <p:sp>
         <p:nvSpPr>
           <p:cNvPr id="15" name="文本框 14"/>
@@ -2954,8 +3000,8 @@
         </p:nvSpPr>
         <p:spPr>
           <a:xfrm>
-            <a:off x="67945" y="20955"/>
-            <a:ext cx="1580515" cy="245110"/>
+            <a:off x="107315" y="3503930"/>
+            <a:ext cx="7546340" cy="786130"/>
           </a:xfrm>
           <a:prstGeom prst="rect">
             <a:avLst/>
@@ -2969,17 +3015,193 @@
           <a:p>
             <a:pPr algn="l"/>
             <a:r>
-              <a:rPr lang="en-US" altLang="zh-CN" sz="1000">
+              <a:rPr lang="en-US" altLang="zh-CN" sz="1125" b="1">
                 <a:latin typeface="Times New Roman" panose="02020603050405020304" charset="0"/>
                 <a:cs typeface="Times New Roman" panose="02020603050405020304" charset="0"/>
                 <a:sym typeface="+mn-ea"/>
               </a:rPr>
-              <a:t>Taukim Xu, et.al. Fig. 3. </a:t>
-            </a:r>
-            <a:endParaRPr lang="en-US" altLang="zh-CN" sz="1000">
+              <a:t>Fig. 3. The lower weight limit and upper height limit defined by the hyperbolic constraint.</a:t>
+            </a:r>
+            <a:r>
+              <a:rPr lang="en-US" altLang="zh-CN" sz="1125">
+                <a:latin typeface="Times New Roman" panose="02020603050405020304" charset="0"/>
+                <a:cs typeface="Times New Roman" panose="02020603050405020304" charset="0"/>
+                <a:sym typeface="+mn-ea"/>
+              </a:rPr>
+              <a:t> (</a:t>
+            </a:r>
+            <a:r>
+              <a:rPr lang="en-US" altLang="zh-CN" sz="1125" b="1">
+                <a:latin typeface="Times New Roman" panose="02020603050405020304" charset="0"/>
+                <a:cs typeface="Times New Roman" panose="02020603050405020304" charset="0"/>
+                <a:sym typeface="+mn-ea"/>
+              </a:rPr>
+              <a:t>A</a:t>
+            </a:r>
+            <a:r>
+              <a:rPr lang="en-US" altLang="zh-CN" sz="1125">
+                <a:latin typeface="Times New Roman" panose="02020603050405020304" charset="0"/>
+                <a:cs typeface="Times New Roman" panose="02020603050405020304" charset="0"/>
+                <a:sym typeface="+mn-ea"/>
+              </a:rPr>
+              <a:t>) Life-course trajectories of the lower weight limit (the top two panels) and upper height limit (the bottom two panels) for each continent. (</a:t>
+            </a:r>
+            <a:r>
+              <a:rPr lang="en-US" altLang="zh-CN" sz="1125" b="1">
+                <a:latin typeface="Times New Roman" panose="02020603050405020304" charset="0"/>
+                <a:cs typeface="Times New Roman" panose="02020603050405020304" charset="0"/>
+                <a:sym typeface="+mn-ea"/>
+              </a:rPr>
+              <a:t>B</a:t>
+            </a:r>
+            <a:r>
+              <a:rPr lang="en-US" altLang="zh-CN" sz="1125">
+                <a:latin typeface="Times New Roman" panose="02020603050405020304" charset="0"/>
+                <a:cs typeface="Times New Roman" panose="02020603050405020304" charset="0"/>
+                <a:sym typeface="+mn-ea"/>
+              </a:rPr>
+              <a:t>) Distribution of the upper height limit among women over 20 years of age and men over 25 years of age. (</a:t>
+            </a:r>
+            <a:r>
+              <a:rPr lang="en-US" altLang="zh-CN" sz="1125" b="1">
+                <a:latin typeface="Times New Roman" panose="02020603050405020304" charset="0"/>
+                <a:cs typeface="Times New Roman" panose="02020603050405020304" charset="0"/>
+                <a:sym typeface="+mn-ea"/>
+              </a:rPr>
+              <a:t>C</a:t>
+            </a:r>
+            <a:r>
+              <a:rPr lang="en-US" altLang="zh-CN" sz="1125">
+                <a:latin typeface="Times New Roman" panose="02020603050405020304" charset="0"/>
+                <a:cs typeface="Times New Roman" panose="02020603050405020304" charset="0"/>
+                <a:sym typeface="+mn-ea"/>
+              </a:rPr>
+              <a:t>) Age-specific proportion of individuals whose observed height exceeds the constraint-model-predicted upper height limit (Ht &gt; 1/b) for each continent.</a:t>
+            </a:r>
+            <a:endParaRPr lang="en-US" altLang="zh-CN" sz="1125">
               <a:latin typeface="Times New Roman" panose="02020603050405020304" charset="0"/>
               <a:cs typeface="Times New Roman" panose="02020603050405020304" charset="0"/>
               <a:sym typeface="+mn-ea"/>
+            </a:endParaRPr>
+          </a:p>
+        </p:txBody>
+      </p:sp>
+      <p:sp>
+        <p:nvSpPr>
+          <p:cNvPr id="2" name="文本框 1"/>
+          <p:cNvSpPr txBox="1"/>
+          <p:nvPr>
+            <p:custDataLst>
+              <p:tags r:id="rId4"/>
+            </p:custDataLst>
+          </p:nvPr>
+        </p:nvSpPr>
+        <p:spPr>
+          <a:xfrm>
+            <a:off x="91989" y="12712"/>
+            <a:ext cx="140205" cy="365693"/>
+          </a:xfrm>
+          <a:prstGeom prst="rect">
+            <a:avLst/>
+          </a:prstGeom>
+          <a:noFill/>
+        </p:spPr>
+        <p:txBody>
+          <a:bodyPr wrap="square" rtlCol="0">
+            <a:noAutofit/>
+          </a:bodyPr>
+          <a:p>
+            <a:pPr algn="ctr"/>
+            <a:r>
+              <a:rPr lang="en-US" altLang="zh-CN" sz="1400" b="1">
+                <a:latin typeface="Times New Roman" panose="02020603050405020304" charset="0"/>
+                <a:cs typeface="Times New Roman" panose="02020603050405020304" charset="0"/>
+              </a:rPr>
+              <a:t>A</a:t>
+            </a:r>
+            <a:endParaRPr lang="en-US" altLang="zh-CN" sz="1400" b="1">
+              <a:latin typeface="Times New Roman" panose="02020603050405020304" charset="0"/>
+              <a:cs typeface="Times New Roman" panose="02020603050405020304" charset="0"/>
+            </a:endParaRPr>
+          </a:p>
+        </p:txBody>
+      </p:sp>
+      <p:sp>
+        <p:nvSpPr>
+          <p:cNvPr id="7" name="文本框 6"/>
+          <p:cNvSpPr txBox="1"/>
+          <p:nvPr>
+            <p:custDataLst>
+              <p:tags r:id="rId5"/>
+            </p:custDataLst>
+          </p:nvPr>
+        </p:nvSpPr>
+        <p:spPr>
+          <a:xfrm>
+            <a:off x="4485997" y="1637596"/>
+            <a:ext cx="140205" cy="365693"/>
+          </a:xfrm>
+          <a:prstGeom prst="rect">
+            <a:avLst/>
+          </a:prstGeom>
+          <a:noFill/>
+        </p:spPr>
+        <p:txBody>
+          <a:bodyPr wrap="square" rtlCol="0">
+            <a:noAutofit/>
+          </a:bodyPr>
+          <a:p>
+            <a:pPr algn="ctr"/>
+            <a:r>
+              <a:rPr lang="en-US" altLang="zh-CN" sz="1400" b="1">
+                <a:latin typeface="Times New Roman" panose="02020603050405020304" charset="0"/>
+                <a:cs typeface="Times New Roman" panose="02020603050405020304" charset="0"/>
+              </a:rPr>
+              <a:t>B</a:t>
+            </a:r>
+            <a:endParaRPr lang="en-US" altLang="zh-CN" sz="1400" b="1">
+              <a:latin typeface="Times New Roman" panose="02020603050405020304" charset="0"/>
+              <a:cs typeface="Times New Roman" panose="02020603050405020304" charset="0"/>
+            </a:endParaRPr>
+          </a:p>
+        </p:txBody>
+      </p:sp>
+      <p:sp>
+        <p:nvSpPr>
+          <p:cNvPr id="6" name="文本框 5"/>
+          <p:cNvSpPr txBox="1"/>
+          <p:nvPr>
+            <p:custDataLst>
+              <p:tags r:id="rId6"/>
+            </p:custDataLst>
+          </p:nvPr>
+        </p:nvSpPr>
+        <p:spPr>
+          <a:xfrm>
+            <a:off x="5657077" y="12712"/>
+            <a:ext cx="140205" cy="365693"/>
+          </a:xfrm>
+          <a:prstGeom prst="rect">
+            <a:avLst/>
+          </a:prstGeom>
+          <a:noFill/>
+        </p:spPr>
+        <p:txBody>
+          <a:bodyPr wrap="square" rtlCol="0">
+            <a:noAutofit/>
+          </a:bodyPr>
+          <a:p>
+            <a:pPr algn="ctr"/>
+            <a:r>
+              <a:rPr lang="en-US" altLang="zh-CN" sz="1400" b="1">
+                <a:latin typeface="Times New Roman" panose="02020603050405020304" charset="0"/>
+                <a:cs typeface="Times New Roman" panose="02020603050405020304" charset="0"/>
+              </a:rPr>
+              <a:t>C</a:t>
+            </a:r>
+            <a:endParaRPr lang="en-US" altLang="zh-CN" sz="1400" b="1">
+              <a:latin typeface="Times New Roman" panose="02020603050405020304" charset="0"/>
+              <a:cs typeface="Times New Roman" panose="02020603050405020304" charset="0"/>
             </a:endParaRPr>
           </a:p>
         </p:txBody>
@@ -2994,11 +3216,23 @@
 
 <file path=ppt/tags/tag1.xml><?xml version="1.0" encoding="utf-8"?>
 <p:tagLst xmlns:p="http://schemas.openxmlformats.org/presentationml/2006/main">
-  <p:tag name="KSO_WM_DIAGRAM_VIRTUALLY_FRAME" val="{&quot;height&quot;:419.8974015748032,&quot;left&quot;:3.086220472440945,&quot;top&quot;:16.64314960629921,&quot;width&quot;:504.85173228346446}"/>
+  <p:tag name="KSO_WM_DIAGRAM_VIRTUALLY_FRAME" val="{&quot;height&quot;:396.8203149606299,&quot;left&quot;:5.878346456692913,&quot;top&quot;:19.499212598425196,&quot;width&quot;:553.4456692913386}"/>
 </p:tagLst>
 </file>
 
 <file path=ppt/tags/tag2.xml><?xml version="1.0" encoding="utf-8"?>
+<p:tagLst xmlns:p="http://schemas.openxmlformats.org/presentationml/2006/main">
+  <p:tag name="KSO_WM_DIAGRAM_VIRTUALLY_FRAME" val="{&quot;height&quot;:396.8203149606299,&quot;left&quot;:5.878346456692913,&quot;top&quot;:19.499212598425196,&quot;width&quot;:553.4456692913386}"/>
+</p:tagLst>
+</file>
+
+<file path=ppt/tags/tag3.xml><?xml version="1.0" encoding="utf-8"?>
+<p:tagLst xmlns:p="http://schemas.openxmlformats.org/presentationml/2006/main">
+  <p:tag name="KSO_WM_DIAGRAM_VIRTUALLY_FRAME" val="{&quot;height&quot;:396.8203149606299,&quot;left&quot;:5.878346456692913,&quot;top&quot;:19.499212598425196,&quot;width&quot;:553.4456692913386}"/>
+</p:tagLst>
+</file>
+
+<file path=ppt/tags/tag4.xml><?xml version="1.0" encoding="utf-8"?>
 <p:tagLst xmlns:p="http://schemas.openxmlformats.org/presentationml/2006/main">
   <p:tag name="commondata" val="eyJoZGlkIjoiMWU4NTYwNDRjODQ2YTFjZWMxNzg1ZTdjYzJmZWI4OGQifQ=="/>
 </p:tagLst>
